--- a/Trade-Surveillance-50-Rules.pptx
+++ b/Trade-Surveillance-50-Rules.pptx
@@ -242,7 +242,7 @@
                     <c:v>Reference data</c:v>
                   </c:pt>
                   <c:pt idx="8">
-                    <c:v>Compliance / conflicts register</c:v>
+                    <c:v>Front-office mandate register</c:v>
                   </c:pt>
                 </c:lvl>
               </c:multiLvlStrCache>
@@ -279,7 +279,7 @@
                   <c:v>7</c:v>
                 </c:pt>
                 <c:pt idx="8">
-                  <c:v>6</c:v>
+                  <c:v>7</c:v>
                 </c:pt>
               </c:numCache>
             </c:numRef>
@@ -5081,7 +5081,7 @@
                 <a:ea typeface="Cambria" pitchFamily="34" charset="-122"/>
                 <a:cs typeface="Cambria" pitchFamily="34" charset="-120"/>
               </a:rPr>
-              <a:t>58</a:t>
+              <a:t>60</a:t>
             </a:r>
             <a:endParaRPr lang="en-US" sz="4000" dirty="0"/>
           </a:p>
@@ -6772,7 +6772,7 @@
                 <a:ea typeface="Calibri" pitchFamily="34" charset="-122"/>
                 <a:cs typeface="Calibri" pitchFamily="34" charset="-120"/>
               </a:rPr>
-              <a:t>settlement country ∈ high-risk list AND ≠ counterparty domicile</a:t>
+              <a:t>settlement country ∈ high-risk list AND ≠ counterparty domicile AND destination differs from the standing settlement…</a:t>
             </a:r>
             <a:endParaRPr lang="en-US" sz="1160" dirty="0"/>
           </a:p>
@@ -10090,7 +10090,7 @@
                 <a:ea typeface="Calibri" pitchFamily="34" charset="-122"/>
                 <a:cs typeface="Calibri" pitchFamily="34" charset="-120"/>
               </a:rPr>
-              <a:t>The fifty rules read 58 distinct data elements from 31 source systems. A rule reads between six and ten fields, and almost every one needs four or more systems to agree with each other.</a:t>
+              <a:t>The fifty rules read 60 distinct data elements from 31 source systems. A rule reads between six and ten fields, and almost every one needs four or more systems to agree with each other.</a:t>
             </a:r>
             <a:endParaRPr lang="en-US" sz="1350" dirty="0"/>
           </a:p>
@@ -10275,7 +10275,7 @@
                 <a:ea typeface="Calibri" pitchFamily="34" charset="-122"/>
                 <a:cs typeface="Calibri" pitchFamily="34" charset="-120"/>
               </a:rPr>
-              <a:t>About half these rules are impossible without it. Capture time will not substitute — the gap between the two is itself what several rules measure.</a:t>
+              <a:t>Sixteen of the fifty — every market-conduct test in the catalogue. Capture time will not substitute: the gap between the two is itself what several of them measure.</a:t>
             </a:r>
             <a:endParaRPr lang="en-US" sz="1100" dirty="0"/>
           </a:p>
@@ -10405,7 +10405,7 @@
                 <a:ea typeface="Calibri" pitchFamily="34" charset="-122"/>
                 <a:cs typeface="Calibri" pitchFamily="34" charset="-120"/>
               </a:rPr>
-              <a:t>Roughly a third depend on the related-party register, wall-crossing approvals, the dated restricted list, and trader-level product authorisations.</a:t>
+              <a:t>Ten rules, four of them Critical. The related-party register, wall-crossing approvals, the dated restricted list, product authorisations, the book ownership register, and concentration caps.</a:t>
             </a:r>
             <a:endParaRPr lang="en-US" sz="1100" dirty="0"/>
           </a:p>
@@ -10659,7 +10659,7 @@
                 <a:ea typeface="Calibri" pitchFamily="34" charset="-122"/>
                 <a:cs typeface="Calibri" pitchFamily="34" charset="-120"/>
               </a:rPr>
-              <a:t>These rules read bookings, prices, timing, limits and settlement. They do not read email, chat or voice.</a:t>
+              <a:t>These rules read bookings, prices, timing, limits and settlement. They do not read email, chat or voice, and they never establish intent.</a:t>
             </a:r>
             <a:endParaRPr lang="en-US" sz="1250" dirty="0"/>
           </a:p>
@@ -10725,7 +10725,7 @@
                 <a:ea typeface="Cambria" pitchFamily="34" charset="-122"/>
                 <a:cs typeface="Cambria" pitchFamily="34" charset="-120"/>
               </a:rPr>
-              <a:t>No intent</a:t>
+              <a:t>No unbooked activity</a:t>
             </a:r>
             <a:endParaRPr lang="en-US" sz="1700" dirty="0"/>
           </a:p>
@@ -10764,7 +10764,7 @@
                 <a:ea typeface="Calibri" pitchFamily="34" charset="-122"/>
                 <a:cs typeface="Calibri" pitchFamily="34" charset="-120"/>
               </a:rPr>
-              <a:t>A rule establishes that something happened, never why. Intent is a conclusion for the reviewer, not an output of the engine.</a:t>
+              <a:t>A pattern whose evidence never reaches a system leaves nothing for any of these rules to fire on.</a:t>
             </a:r>
             <a:endParaRPr lang="en-US" sz="1250" dirty="0"/>
           </a:p>
@@ -10830,7 +10830,7 @@
                 <a:ea typeface="Cambria" pitchFamily="34" charset="-122"/>
                 <a:cs typeface="Cambria" pitchFamily="34" charset="-120"/>
               </a:rPr>
-              <a:t>No unbooked activity</a:t>
+              <a:t>Six typologies absent by design</a:t>
             </a:r>
             <a:endParaRPr lang="en-US" sz="1700" dirty="0"/>
           </a:p>
@@ -10869,7 +10869,7 @@
                 <a:ea typeface="Calibri" pitchFamily="34" charset="-122"/>
                 <a:cs typeface="Calibri" pitchFamily="34" charset="-120"/>
               </a:rPr>
-              <a:t>A pattern whose evidence never reaches a system leaves nothing for any of these rules to fire on.</a:t>
+              <a:t>Spoofing as distinct from layering, quote stuffing, personal account dealing, cross-product manipulation, barrier gaming — each named in the catalogue with the reason.</a:t>
             </a:r>
             <a:endParaRPr lang="en-US" sz="1250" dirty="0"/>
           </a:p>
@@ -12185,7 +12185,7 @@
                 <a:ea typeface="Cambria" pitchFamily="34" charset="-122"/>
                 <a:cs typeface="Cambria" pitchFamily="34" charset="-120"/>
               </a:rPr>
-              <a:t>7.6</a:t>
+              <a:t>7.8</a:t>
             </a:r>
             <a:endParaRPr lang="en-US" sz="3200" dirty="0"/>
           </a:p>
@@ -12313,7 +12313,7 @@
                 <a:ea typeface="Calibri" pitchFamily="34" charset="-122"/>
                 <a:cs typeface="Calibri" pitchFamily="34" charset="-120"/>
               </a:rPr>
-              <a:t>Own the four reference data sets</a:t>
+              <a:t>Own the six reference data sets</a:t>
             </a:r>
             <a:endParaRPr lang="en-US" sz="1300" dirty="0"/>
           </a:p>
@@ -12352,7 +12352,7 @@
                 <a:ea typeface="Calibri" pitchFamily="34" charset="-122"/>
                 <a:cs typeface="Calibri" pitchFamily="34" charset="-120"/>
               </a:rPr>
-              <a:t>Related-party register, wall-crossing approvals, the dated restricted list, and trader-level product authorisations. None has an owner today, and a third of the rule set depends on them.</a:t>
+              <a:t>Related-party register, wall-crossing approvals, the dated restricted list, product authorisations, book ownership, concentration caps. None has an owner today; ten rules depend on them, four of them Critical.</a:t>
             </a:r>
             <a:endParaRPr lang="en-US" sz="1150" dirty="0"/>
           </a:p>
@@ -12480,7 +12480,7 @@
                 <a:ea typeface="Calibri" pitchFamily="34" charset="-122"/>
                 <a:cs typeface="Calibri" pitchFamily="34" charset="-120"/>
               </a:rPr>
-              <a:t>Half these rules cannot run on capture time. This is a trade-capture and venue-feed commitment, not a surveillance one.</a:t>
+              <a:t>Sixteen rules cannot run on capture time, including every market-conduct typology. A trade-capture and venue-feed commitment, not a surveillance one.</a:t>
             </a:r>
             <a:endParaRPr lang="en-US" sz="1150" dirty="0"/>
           </a:p>
@@ -18119,7 +18119,7 @@
                 <a:ea typeface="Calibri" pitchFamily="34" charset="-122"/>
                 <a:cs typeface="Calibri" pitchFamily="34" charset="-120"/>
               </a:rPr>
-              <a:t>volume in the 16:00 fix window &gt; 40% of this trader's daily volume in that pair, and one-directional</a:t>
+              <a:t>volume inside the applicable fixing window for the pair (WM/R 16:00 London — five minutes for majors, one for the…</a:t>
             </a:r>
             <a:endParaRPr lang="en-US" sz="1080" dirty="0"/>
           </a:p>
@@ -18302,7 +18302,7 @@
                 <a:ea typeface="Calibri" pitchFamily="34" charset="-122"/>
                 <a:cs typeface="Calibri" pitchFamily="34" charset="-120"/>
               </a:rPr>
-              <a:t>cancel-to-trade ratio &gt; 20:1 on the API/Algo channel in a session, against a trader baseline below 6:1</a:t>
+              <a:t>cancel-to-trade ratio &gt; 20:1 in a session on one venue, AND the cancelled orders resting on the opposite side to the…</a:t>
             </a:r>
             <a:endParaRPr lang="en-US" sz="1080" dirty="0"/>
           </a:p>
@@ -23974,7 +23974,7 @@
                 <a:ea typeface="Calibri" pitchFamily="34" charset="-122"/>
                 <a:cs typeface="Calibri" pitchFamily="34" charset="-120"/>
               </a:rPr>
-              <a:t>day-one P&amp;L &gt; 2.5% of notional on a model-priced structure (barriers, digitals, accumulators, variance, swaptions…</a:t>
+              <a:t>day-one P&amp;L beyond the model-validation tolerance for that structure, measured against premium or fee — never…</a:t>
             </a:r>
             <a:endParaRPr lang="en-US" sz="1080" dirty="0"/>
           </a:p>
